--- a/docs/outreach/slides/psyche_slides.pptx
+++ b/docs/outreach/slides/psyche_slides.pptx
@@ -5825,7 +5825,7 @@
                 </a:solidFill>
                 <a:latin typeface="Calibri"/>
               </a:rPr>
-              <a:t>The thesis: adversarial and property-based testing, plus loop-closure</a:t>
+              <a:t>The approach: adversarial and property-based testing, plus loop-closure</a:t>
             </a:r>
           </a:p>
         </p:txBody>
